--- a/中越詩歌/我曾捨命為你_Ta hy sinh vì con hết.pptx
+++ b/中越詩歌/我曾捨命為你_Ta hy sinh vì con hết.pptx
@@ -128,6 +128,11 @@
       </a:defRPr>
     </a:lvl9pPr>
   </p:defaultTextStyle>
+  <p:extLst>
+    <p:ext uri="{EFAFB233-063F-42B5-8137-9DF3F51BA10A}">
+      <p15:sldGuideLst xmlns:p15="http://schemas.microsoft.com/office/powerpoint/2012/main"/>
+    </p:ext>
+  </p:extLst>
 </p:presentation>
 </file>
 
@@ -169,7 +174,7 @@
           <a:lstStyle/>
           <a:p>
             <a:r>
-              <a:rPr lang="en-US" altLang="zh-TW" smtClean="0"/>
+              <a:rPr lang="en-US" altLang="zh-TW"/>
               <a:t>Click to edit Master title style</a:t>
             </a:r>
             <a:endParaRPr lang="zh-TW" altLang="en-US"/>
@@ -288,7 +293,7 @@
           </a:lstStyle>
           <a:p>
             <a:r>
-              <a:rPr lang="en-US" altLang="zh-TW" smtClean="0"/>
+              <a:rPr lang="en-US" altLang="zh-TW"/>
               <a:t>Click to edit Master subtitle style</a:t>
             </a:r>
             <a:endParaRPr lang="zh-TW" altLang="en-US"/>
@@ -312,7 +317,7 @@
           <a:p>
             <a:fld id="{42E32916-151F-497B-85BB-675B73A5F732}" type="datetimeFigureOut">
               <a:rPr lang="vi-VN" smtClean="0"/>
-              <a:t>01/04/2021</a:t>
+              <a:t>15/04/2025</a:t>
             </a:fld>
             <a:endParaRPr lang="vi-VN"/>
           </a:p>
@@ -406,7 +411,7 @@
           <a:lstStyle/>
           <a:p>
             <a:r>
-              <a:rPr lang="en-US" altLang="zh-TW" smtClean="0"/>
+              <a:rPr lang="en-US" altLang="zh-TW"/>
               <a:t>Click to edit Master title style</a:t>
             </a:r>
             <a:endParaRPr lang="zh-TW" altLang="en-US"/>
@@ -430,35 +435,35 @@
           <a:p>
             <a:pPr lvl="0"/>
             <a:r>
-              <a:rPr lang="en-US" altLang="zh-TW" smtClean="0"/>
+              <a:rPr lang="en-US" altLang="zh-TW"/>
               <a:t>Edit Master text styles</a:t>
             </a:r>
           </a:p>
           <a:p>
             <a:pPr lvl="1"/>
             <a:r>
-              <a:rPr lang="en-US" altLang="zh-TW" smtClean="0"/>
+              <a:rPr lang="en-US" altLang="zh-TW"/>
               <a:t>Second level</a:t>
             </a:r>
           </a:p>
           <a:p>
             <a:pPr lvl="2"/>
             <a:r>
-              <a:rPr lang="en-US" altLang="zh-TW" smtClean="0"/>
+              <a:rPr lang="en-US" altLang="zh-TW"/>
               <a:t>Third level</a:t>
             </a:r>
           </a:p>
           <a:p>
             <a:pPr lvl="3"/>
             <a:r>
-              <a:rPr lang="en-US" altLang="zh-TW" smtClean="0"/>
+              <a:rPr lang="en-US" altLang="zh-TW"/>
               <a:t>Fourth level</a:t>
             </a:r>
           </a:p>
           <a:p>
             <a:pPr lvl="4"/>
             <a:r>
-              <a:rPr lang="en-US" altLang="zh-TW" smtClean="0"/>
+              <a:rPr lang="en-US" altLang="zh-TW"/>
               <a:t>Fifth level</a:t>
             </a:r>
             <a:endParaRPr lang="zh-TW" altLang="en-US"/>
@@ -482,7 +487,7 @@
           <a:p>
             <a:fld id="{42E32916-151F-497B-85BB-675B73A5F732}" type="datetimeFigureOut">
               <a:rPr lang="vi-VN" smtClean="0"/>
-              <a:t>01/04/2021</a:t>
+              <a:t>15/04/2025</a:t>
             </a:fld>
             <a:endParaRPr lang="vi-VN"/>
           </a:p>
@@ -581,7 +586,7 @@
           <a:lstStyle/>
           <a:p>
             <a:r>
-              <a:rPr lang="en-US" altLang="zh-TW" smtClean="0"/>
+              <a:rPr lang="en-US" altLang="zh-TW"/>
               <a:t>Click to edit Master title style</a:t>
             </a:r>
             <a:endParaRPr lang="zh-TW" altLang="en-US"/>
@@ -610,35 +615,35 @@
           <a:p>
             <a:pPr lvl="0"/>
             <a:r>
-              <a:rPr lang="en-US" altLang="zh-TW" smtClean="0"/>
+              <a:rPr lang="en-US" altLang="zh-TW"/>
               <a:t>Edit Master text styles</a:t>
             </a:r>
           </a:p>
           <a:p>
             <a:pPr lvl="1"/>
             <a:r>
-              <a:rPr lang="en-US" altLang="zh-TW" smtClean="0"/>
+              <a:rPr lang="en-US" altLang="zh-TW"/>
               <a:t>Second level</a:t>
             </a:r>
           </a:p>
           <a:p>
             <a:pPr lvl="2"/>
             <a:r>
-              <a:rPr lang="en-US" altLang="zh-TW" smtClean="0"/>
+              <a:rPr lang="en-US" altLang="zh-TW"/>
               <a:t>Third level</a:t>
             </a:r>
           </a:p>
           <a:p>
             <a:pPr lvl="3"/>
             <a:r>
-              <a:rPr lang="en-US" altLang="zh-TW" smtClean="0"/>
+              <a:rPr lang="en-US" altLang="zh-TW"/>
               <a:t>Fourth level</a:t>
             </a:r>
           </a:p>
           <a:p>
             <a:pPr lvl="4"/>
             <a:r>
-              <a:rPr lang="en-US" altLang="zh-TW" smtClean="0"/>
+              <a:rPr lang="en-US" altLang="zh-TW"/>
               <a:t>Fifth level</a:t>
             </a:r>
             <a:endParaRPr lang="zh-TW" altLang="en-US"/>
@@ -662,7 +667,7 @@
           <a:p>
             <a:fld id="{42E32916-151F-497B-85BB-675B73A5F732}" type="datetimeFigureOut">
               <a:rPr lang="vi-VN" smtClean="0"/>
-              <a:t>01/04/2021</a:t>
+              <a:t>15/04/2025</a:t>
             </a:fld>
             <a:endParaRPr lang="vi-VN"/>
           </a:p>
@@ -756,7 +761,7 @@
           <a:lstStyle/>
           <a:p>
             <a:r>
-              <a:rPr lang="en-US" altLang="zh-TW" smtClean="0"/>
+              <a:rPr lang="en-US" altLang="zh-TW"/>
               <a:t>Click to edit Master title style</a:t>
             </a:r>
             <a:endParaRPr lang="zh-TW" altLang="en-US"/>
@@ -780,35 +785,35 @@
           <a:p>
             <a:pPr lvl="0"/>
             <a:r>
-              <a:rPr lang="en-US" altLang="zh-TW" smtClean="0"/>
+              <a:rPr lang="en-US" altLang="zh-TW"/>
               <a:t>Edit Master text styles</a:t>
             </a:r>
           </a:p>
           <a:p>
             <a:pPr lvl="1"/>
             <a:r>
-              <a:rPr lang="en-US" altLang="zh-TW" smtClean="0"/>
+              <a:rPr lang="en-US" altLang="zh-TW"/>
               <a:t>Second level</a:t>
             </a:r>
           </a:p>
           <a:p>
             <a:pPr lvl="2"/>
             <a:r>
-              <a:rPr lang="en-US" altLang="zh-TW" smtClean="0"/>
+              <a:rPr lang="en-US" altLang="zh-TW"/>
               <a:t>Third level</a:t>
             </a:r>
           </a:p>
           <a:p>
             <a:pPr lvl="3"/>
             <a:r>
-              <a:rPr lang="en-US" altLang="zh-TW" smtClean="0"/>
+              <a:rPr lang="en-US" altLang="zh-TW"/>
               <a:t>Fourth level</a:t>
             </a:r>
           </a:p>
           <a:p>
             <a:pPr lvl="4"/>
             <a:r>
-              <a:rPr lang="en-US" altLang="zh-TW" smtClean="0"/>
+              <a:rPr lang="en-US" altLang="zh-TW"/>
               <a:t>Fifth level</a:t>
             </a:r>
             <a:endParaRPr lang="zh-TW" altLang="en-US"/>
@@ -832,7 +837,7 @@
           <a:p>
             <a:fld id="{42E32916-151F-497B-85BB-675B73A5F732}" type="datetimeFigureOut">
               <a:rPr lang="vi-VN" smtClean="0"/>
-              <a:t>01/04/2021</a:t>
+              <a:t>15/04/2025</a:t>
             </a:fld>
             <a:endParaRPr lang="vi-VN"/>
           </a:p>
@@ -935,7 +940,7 @@
           </a:lstStyle>
           <a:p>
             <a:r>
-              <a:rPr lang="en-US" altLang="zh-TW" smtClean="0"/>
+              <a:rPr lang="en-US" altLang="zh-TW"/>
               <a:t>Click to edit Master title style</a:t>
             </a:r>
             <a:endParaRPr lang="zh-TW" altLang="en-US"/>
@@ -1055,7 +1060,7 @@
           <a:p>
             <a:pPr lvl="0"/>
             <a:r>
-              <a:rPr lang="en-US" altLang="zh-TW" smtClean="0"/>
+              <a:rPr lang="en-US" altLang="zh-TW"/>
               <a:t>Edit Master text styles</a:t>
             </a:r>
           </a:p>
@@ -1078,7 +1083,7 @@
           <a:p>
             <a:fld id="{42E32916-151F-497B-85BB-675B73A5F732}" type="datetimeFigureOut">
               <a:rPr lang="vi-VN" smtClean="0"/>
-              <a:t>01/04/2021</a:t>
+              <a:t>15/04/2025</a:t>
             </a:fld>
             <a:endParaRPr lang="vi-VN"/>
           </a:p>
@@ -1172,7 +1177,7 @@
           <a:lstStyle/>
           <a:p>
             <a:r>
-              <a:rPr lang="en-US" altLang="zh-TW" smtClean="0"/>
+              <a:rPr lang="en-US" altLang="zh-TW"/>
               <a:t>Click to edit Master title style</a:t>
             </a:r>
             <a:endParaRPr lang="zh-TW" altLang="en-US"/>
@@ -1229,35 +1234,35 @@
           <a:p>
             <a:pPr lvl="0"/>
             <a:r>
-              <a:rPr lang="en-US" altLang="zh-TW" smtClean="0"/>
+              <a:rPr lang="en-US" altLang="zh-TW"/>
               <a:t>Edit Master text styles</a:t>
             </a:r>
           </a:p>
           <a:p>
             <a:pPr lvl="1"/>
             <a:r>
-              <a:rPr lang="en-US" altLang="zh-TW" smtClean="0"/>
+              <a:rPr lang="en-US" altLang="zh-TW"/>
               <a:t>Second level</a:t>
             </a:r>
           </a:p>
           <a:p>
             <a:pPr lvl="2"/>
             <a:r>
-              <a:rPr lang="en-US" altLang="zh-TW" smtClean="0"/>
+              <a:rPr lang="en-US" altLang="zh-TW"/>
               <a:t>Third level</a:t>
             </a:r>
           </a:p>
           <a:p>
             <a:pPr lvl="3"/>
             <a:r>
-              <a:rPr lang="en-US" altLang="zh-TW" smtClean="0"/>
+              <a:rPr lang="en-US" altLang="zh-TW"/>
               <a:t>Fourth level</a:t>
             </a:r>
           </a:p>
           <a:p>
             <a:pPr lvl="4"/>
             <a:r>
-              <a:rPr lang="en-US" altLang="zh-TW" smtClean="0"/>
+              <a:rPr lang="en-US" altLang="zh-TW"/>
               <a:t>Fifth level</a:t>
             </a:r>
             <a:endParaRPr lang="zh-TW" altLang="en-US"/>
@@ -1314,35 +1319,35 @@
           <a:p>
             <a:pPr lvl="0"/>
             <a:r>
-              <a:rPr lang="en-US" altLang="zh-TW" smtClean="0"/>
+              <a:rPr lang="en-US" altLang="zh-TW"/>
               <a:t>Edit Master text styles</a:t>
             </a:r>
           </a:p>
           <a:p>
             <a:pPr lvl="1"/>
             <a:r>
-              <a:rPr lang="en-US" altLang="zh-TW" smtClean="0"/>
+              <a:rPr lang="en-US" altLang="zh-TW"/>
               <a:t>Second level</a:t>
             </a:r>
           </a:p>
           <a:p>
             <a:pPr lvl="2"/>
             <a:r>
-              <a:rPr lang="en-US" altLang="zh-TW" smtClean="0"/>
+              <a:rPr lang="en-US" altLang="zh-TW"/>
               <a:t>Third level</a:t>
             </a:r>
           </a:p>
           <a:p>
             <a:pPr lvl="3"/>
             <a:r>
-              <a:rPr lang="en-US" altLang="zh-TW" smtClean="0"/>
+              <a:rPr lang="en-US" altLang="zh-TW"/>
               <a:t>Fourth level</a:t>
             </a:r>
           </a:p>
           <a:p>
             <a:pPr lvl="4"/>
             <a:r>
-              <a:rPr lang="en-US" altLang="zh-TW" smtClean="0"/>
+              <a:rPr lang="en-US" altLang="zh-TW"/>
               <a:t>Fifth level</a:t>
             </a:r>
             <a:endParaRPr lang="zh-TW" altLang="en-US"/>
@@ -1366,7 +1371,7 @@
           <a:p>
             <a:fld id="{42E32916-151F-497B-85BB-675B73A5F732}" type="datetimeFigureOut">
               <a:rPr lang="vi-VN" smtClean="0"/>
-              <a:t>01/04/2021</a:t>
+              <a:t>15/04/2025</a:t>
             </a:fld>
             <a:endParaRPr lang="vi-VN"/>
           </a:p>
@@ -1464,7 +1469,7 @@
           </a:lstStyle>
           <a:p>
             <a:r>
-              <a:rPr lang="en-US" altLang="zh-TW" smtClean="0"/>
+              <a:rPr lang="en-US" altLang="zh-TW"/>
               <a:t>Click to edit Master title style</a:t>
             </a:r>
             <a:endParaRPr lang="zh-TW" altLang="en-US"/>
@@ -1530,7 +1535,7 @@
           <a:p>
             <a:pPr lvl="0"/>
             <a:r>
-              <a:rPr lang="en-US" altLang="zh-TW" smtClean="0"/>
+              <a:rPr lang="en-US" altLang="zh-TW"/>
               <a:t>Edit Master text styles</a:t>
             </a:r>
           </a:p>
@@ -1586,35 +1591,35 @@
           <a:p>
             <a:pPr lvl="0"/>
             <a:r>
-              <a:rPr lang="en-US" altLang="zh-TW" smtClean="0"/>
+              <a:rPr lang="en-US" altLang="zh-TW"/>
               <a:t>Edit Master text styles</a:t>
             </a:r>
           </a:p>
           <a:p>
             <a:pPr lvl="1"/>
             <a:r>
-              <a:rPr lang="en-US" altLang="zh-TW" smtClean="0"/>
+              <a:rPr lang="en-US" altLang="zh-TW"/>
               <a:t>Second level</a:t>
             </a:r>
           </a:p>
           <a:p>
             <a:pPr lvl="2"/>
             <a:r>
-              <a:rPr lang="en-US" altLang="zh-TW" smtClean="0"/>
+              <a:rPr lang="en-US" altLang="zh-TW"/>
               <a:t>Third level</a:t>
             </a:r>
           </a:p>
           <a:p>
             <a:pPr lvl="3"/>
             <a:r>
-              <a:rPr lang="en-US" altLang="zh-TW" smtClean="0"/>
+              <a:rPr lang="en-US" altLang="zh-TW"/>
               <a:t>Fourth level</a:t>
             </a:r>
           </a:p>
           <a:p>
             <a:pPr lvl="4"/>
             <a:r>
-              <a:rPr lang="en-US" altLang="zh-TW" smtClean="0"/>
+              <a:rPr lang="en-US" altLang="zh-TW"/>
               <a:t>Fifth level</a:t>
             </a:r>
             <a:endParaRPr lang="zh-TW" altLang="en-US"/>
@@ -1680,7 +1685,7 @@
           <a:p>
             <a:pPr lvl="0"/>
             <a:r>
-              <a:rPr lang="en-US" altLang="zh-TW" smtClean="0"/>
+              <a:rPr lang="en-US" altLang="zh-TW"/>
               <a:t>Edit Master text styles</a:t>
             </a:r>
           </a:p>
@@ -1736,35 +1741,35 @@
           <a:p>
             <a:pPr lvl="0"/>
             <a:r>
-              <a:rPr lang="en-US" altLang="zh-TW" smtClean="0"/>
+              <a:rPr lang="en-US" altLang="zh-TW"/>
               <a:t>Edit Master text styles</a:t>
             </a:r>
           </a:p>
           <a:p>
             <a:pPr lvl="1"/>
             <a:r>
-              <a:rPr lang="en-US" altLang="zh-TW" smtClean="0"/>
+              <a:rPr lang="en-US" altLang="zh-TW"/>
               <a:t>Second level</a:t>
             </a:r>
           </a:p>
           <a:p>
             <a:pPr lvl="2"/>
             <a:r>
-              <a:rPr lang="en-US" altLang="zh-TW" smtClean="0"/>
+              <a:rPr lang="en-US" altLang="zh-TW"/>
               <a:t>Third level</a:t>
             </a:r>
           </a:p>
           <a:p>
             <a:pPr lvl="3"/>
             <a:r>
-              <a:rPr lang="en-US" altLang="zh-TW" smtClean="0"/>
+              <a:rPr lang="en-US" altLang="zh-TW"/>
               <a:t>Fourth level</a:t>
             </a:r>
           </a:p>
           <a:p>
             <a:pPr lvl="4"/>
             <a:r>
-              <a:rPr lang="en-US" altLang="zh-TW" smtClean="0"/>
+              <a:rPr lang="en-US" altLang="zh-TW"/>
               <a:t>Fifth level</a:t>
             </a:r>
             <a:endParaRPr lang="zh-TW" altLang="en-US"/>
@@ -1788,7 +1793,7 @@
           <a:p>
             <a:fld id="{42E32916-151F-497B-85BB-675B73A5F732}" type="datetimeFigureOut">
               <a:rPr lang="vi-VN" smtClean="0"/>
-              <a:t>01/04/2021</a:t>
+              <a:t>15/04/2025</a:t>
             </a:fld>
             <a:endParaRPr lang="vi-VN"/>
           </a:p>
@@ -1882,7 +1887,7 @@
           <a:lstStyle/>
           <a:p>
             <a:r>
-              <a:rPr lang="en-US" altLang="zh-TW" smtClean="0"/>
+              <a:rPr lang="en-US" altLang="zh-TW"/>
               <a:t>Click to edit Master title style</a:t>
             </a:r>
             <a:endParaRPr lang="zh-TW" altLang="en-US"/>
@@ -1906,7 +1911,7 @@
           <a:p>
             <a:fld id="{42E32916-151F-497B-85BB-675B73A5F732}" type="datetimeFigureOut">
               <a:rPr lang="vi-VN" smtClean="0"/>
-              <a:t>01/04/2021</a:t>
+              <a:t>15/04/2025</a:t>
             </a:fld>
             <a:endParaRPr lang="vi-VN"/>
           </a:p>
@@ -2001,7 +2006,7 @@
           <a:p>
             <a:fld id="{42E32916-151F-497B-85BB-675B73A5F732}" type="datetimeFigureOut">
               <a:rPr lang="vi-VN" smtClean="0"/>
-              <a:t>01/04/2021</a:t>
+              <a:t>15/04/2025</a:t>
             </a:fld>
             <a:endParaRPr lang="vi-VN"/>
           </a:p>
@@ -2104,7 +2109,7 @@
           </a:lstStyle>
           <a:p>
             <a:r>
-              <a:rPr lang="en-US" altLang="zh-TW" smtClean="0"/>
+              <a:rPr lang="en-US" altLang="zh-TW"/>
               <a:t>Click to edit Master title style</a:t>
             </a:r>
             <a:endParaRPr lang="zh-TW" altLang="en-US"/>
@@ -2161,35 +2166,35 @@
           <a:p>
             <a:pPr lvl="0"/>
             <a:r>
-              <a:rPr lang="en-US" altLang="zh-TW" smtClean="0"/>
+              <a:rPr lang="en-US" altLang="zh-TW"/>
               <a:t>Edit Master text styles</a:t>
             </a:r>
           </a:p>
           <a:p>
             <a:pPr lvl="1"/>
             <a:r>
-              <a:rPr lang="en-US" altLang="zh-TW" smtClean="0"/>
+              <a:rPr lang="en-US" altLang="zh-TW"/>
               <a:t>Second level</a:t>
             </a:r>
           </a:p>
           <a:p>
             <a:pPr lvl="2"/>
             <a:r>
-              <a:rPr lang="en-US" altLang="zh-TW" smtClean="0"/>
+              <a:rPr lang="en-US" altLang="zh-TW"/>
               <a:t>Third level</a:t>
             </a:r>
           </a:p>
           <a:p>
             <a:pPr lvl="3"/>
             <a:r>
-              <a:rPr lang="en-US" altLang="zh-TW" smtClean="0"/>
+              <a:rPr lang="en-US" altLang="zh-TW"/>
               <a:t>Fourth level</a:t>
             </a:r>
           </a:p>
           <a:p>
             <a:pPr lvl="4"/>
             <a:r>
-              <a:rPr lang="en-US" altLang="zh-TW" smtClean="0"/>
+              <a:rPr lang="en-US" altLang="zh-TW"/>
               <a:t>Fifth level</a:t>
             </a:r>
             <a:endParaRPr lang="zh-TW" altLang="en-US"/>
@@ -2255,7 +2260,7 @@
           <a:p>
             <a:pPr lvl="0"/>
             <a:r>
-              <a:rPr lang="en-US" altLang="zh-TW" smtClean="0"/>
+              <a:rPr lang="en-US" altLang="zh-TW"/>
               <a:t>Edit Master text styles</a:t>
             </a:r>
           </a:p>
@@ -2278,7 +2283,7 @@
           <a:p>
             <a:fld id="{42E32916-151F-497B-85BB-675B73A5F732}" type="datetimeFigureOut">
               <a:rPr lang="vi-VN" smtClean="0"/>
-              <a:t>01/04/2021</a:t>
+              <a:t>15/04/2025</a:t>
             </a:fld>
             <a:endParaRPr lang="vi-VN"/>
           </a:p>
@@ -2381,7 +2386,7 @@
           </a:lstStyle>
           <a:p>
             <a:r>
-              <a:rPr lang="en-US" altLang="zh-TW" smtClean="0"/>
+              <a:rPr lang="en-US" altLang="zh-TW"/>
               <a:t>Click to edit Master title style</a:t>
             </a:r>
             <a:endParaRPr lang="zh-TW" altLang="en-US"/>
@@ -2446,7 +2451,7 @@
           </a:lstStyle>
           <a:p>
             <a:r>
-              <a:rPr lang="en-US" altLang="zh-TW" smtClean="0"/>
+              <a:rPr lang="en-US" altLang="zh-TW"/>
               <a:t>Click icon to add picture</a:t>
             </a:r>
             <a:endParaRPr lang="zh-TW" altLang="en-US"/>
@@ -2512,7 +2517,7 @@
           <a:p>
             <a:pPr lvl="0"/>
             <a:r>
-              <a:rPr lang="en-US" altLang="zh-TW" smtClean="0"/>
+              <a:rPr lang="en-US" altLang="zh-TW"/>
               <a:t>Edit Master text styles</a:t>
             </a:r>
           </a:p>
@@ -2535,7 +2540,7 @@
           <a:p>
             <a:fld id="{42E32916-151F-497B-85BB-675B73A5F732}" type="datetimeFigureOut">
               <a:rPr lang="vi-VN" smtClean="0"/>
-              <a:t>01/04/2021</a:t>
+              <a:t>15/04/2025</a:t>
             </a:fld>
             <a:endParaRPr lang="vi-VN"/>
           </a:p>
@@ -2649,10 +2654,9 @@
           <a:lstStyle/>
           <a:p>
             <a:r>
-              <a:rPr lang="zh-TW" altLang="en-US" smtClean="0"/>
+              <a:rPr lang="zh-TW" altLang="en-US"/>
               <a:t>按一下以編輯母片標題樣式</a:t>
             </a:r>
-            <a:endParaRPr lang="zh-TW" altLang="en-US"/>
           </a:p>
         </p:txBody>
       </p:sp>
@@ -2683,38 +2687,37 @@
           <a:p>
             <a:pPr lvl="0"/>
             <a:r>
-              <a:rPr lang="zh-TW" altLang="en-US" smtClean="0"/>
+              <a:rPr lang="zh-TW" altLang="en-US"/>
               <a:t>按一下以編輯母片文字樣式</a:t>
             </a:r>
           </a:p>
           <a:p>
             <a:pPr lvl="1"/>
             <a:r>
-              <a:rPr lang="zh-TW" altLang="en-US" smtClean="0"/>
+              <a:rPr lang="zh-TW" altLang="en-US"/>
               <a:t>第二層</a:t>
             </a:r>
           </a:p>
           <a:p>
             <a:pPr lvl="2"/>
             <a:r>
-              <a:rPr lang="zh-TW" altLang="en-US" smtClean="0"/>
+              <a:rPr lang="zh-TW" altLang="en-US"/>
               <a:t>第三層</a:t>
             </a:r>
           </a:p>
           <a:p>
             <a:pPr lvl="3"/>
             <a:r>
-              <a:rPr lang="zh-TW" altLang="en-US" smtClean="0"/>
+              <a:rPr lang="zh-TW" altLang="en-US"/>
               <a:t>第四層</a:t>
             </a:r>
           </a:p>
           <a:p>
             <a:pPr lvl="4"/>
             <a:r>
-              <a:rPr lang="zh-TW" altLang="en-US" smtClean="0"/>
+              <a:rPr lang="zh-TW" altLang="en-US"/>
               <a:t>第五層</a:t>
             </a:r>
-            <a:endParaRPr lang="zh-TW" altLang="en-US"/>
           </a:p>
         </p:txBody>
       </p:sp>
@@ -2753,7 +2756,7 @@
           <a:p>
             <a:fld id="{42E32916-151F-497B-85BB-675B73A5F732}" type="datetimeFigureOut">
               <a:rPr lang="vi-VN" smtClean="0"/>
-              <a:t>01/04/2021</a:t>
+              <a:t>15/04/2025</a:t>
             </a:fld>
             <a:endParaRPr lang="vi-VN"/>
           </a:p>
@@ -3151,7 +3154,7 @@
           <a:lstStyle/>
           <a:p>
             <a:r>
-              <a:rPr lang="zh-CN" altLang="en-US" b="1" dirty="0" smtClean="0">
+              <a:rPr lang="zh-CN" altLang="en-US" b="1" dirty="0">
                 <a:solidFill>
                   <a:srgbClr val="660033"/>
                 </a:solidFill>
@@ -3168,7 +3171,7 @@
               <a:t>宣 </a:t>
             </a:r>
             <a:r>
-              <a:rPr lang="en-US" altLang="zh-CN" b="1" dirty="0" smtClean="0">
+              <a:rPr lang="en-US" altLang="zh-CN" b="1" dirty="0">
                 <a:solidFill>
                   <a:srgbClr val="660033"/>
                 </a:solidFill>
@@ -3199,24 +3202,7 @@
                 <a:latin typeface="微軟正黑體" pitchFamily="34" charset="-120"/>
                 <a:ea typeface="微軟正黑體" pitchFamily="34" charset="-120"/>
               </a:rPr>
-              <a:t>我</a:t>
-            </a:r>
-            <a:r>
-              <a:rPr lang="zh-TW" altLang="en-US" sz="7200" b="1" dirty="0">
-                <a:solidFill>
-                  <a:srgbClr val="660033"/>
-                </a:solidFill>
-                <a:effectLst>
-                  <a:outerShdw blurRad="38100" dist="38100" dir="2700000" algn="tl">
-                    <a:srgbClr val="000000">
-                      <a:alpha val="43137"/>
-                    </a:srgbClr>
-                  </a:outerShdw>
-                </a:effectLst>
-                <a:latin typeface="微軟正黑體" pitchFamily="34" charset="-120"/>
-                <a:ea typeface="微軟正黑體" pitchFamily="34" charset="-120"/>
-              </a:rPr>
-              <a:t>曾捨命為你</a:t>
+              <a:t>我曾捨命為你</a:t>
             </a:r>
           </a:p>
         </p:txBody>
@@ -3378,13 +3364,6 @@
               </a:rPr>
               <a:t>為你為你天家曾捨</a:t>
             </a:r>
-            <a:endParaRPr lang="zh-TW" altLang="en-US" sz="6400" b="1" dirty="0">
-              <a:solidFill>
-                <a:srgbClr val="660033"/>
-              </a:solidFill>
-              <a:latin typeface="微軟正黑體" pitchFamily="34" charset="-120"/>
-              <a:ea typeface="微軟正黑體" pitchFamily="34" charset="-120"/>
-            </a:endParaRPr>
           </a:p>
         </p:txBody>
       </p:sp>
@@ -3722,23 +3701,7 @@
                   <a:srgbClr val="660033"/>
                 </a:solidFill>
               </a:rPr>
-              <a:t>( </a:t>
-            </a:r>
-            <a:r>
-              <a:rPr lang="en-US" sz="4267" b="1" dirty="0">
-                <a:solidFill>
-                  <a:srgbClr val="660033"/>
-                </a:solidFill>
-              </a:rPr>
-              <a:t>2 </a:t>
-            </a:r>
-            <a:r>
-              <a:rPr lang="en-US" sz="4267" b="1" dirty="0">
-                <a:solidFill>
-                  <a:srgbClr val="660033"/>
-                </a:solidFill>
-              </a:rPr>
-              <a:t>)</a:t>
+              <a:t>( 2 / 4 )</a:t>
             </a:r>
             <a:endParaRPr lang="vi-VN" sz="4267" b="1" dirty="0">
               <a:solidFill>
@@ -4051,14 +4014,6 @@
               </a:rPr>
               <a:t>?</a:t>
             </a:r>
-            <a:endParaRPr lang="en-US" b="1" dirty="0">
-              <a:solidFill>
-                <a:srgbClr val="000066"/>
-              </a:solidFill>
-              <a:latin typeface="Calibri" panose="020F0502020204030204" pitchFamily="34" charset="0"/>
-              <a:ea typeface="微軟正黑體" pitchFamily="34" charset="-120"/>
-              <a:cs typeface="Calibri" panose="020F0502020204030204" pitchFamily="34" charset="0"/>
-            </a:endParaRPr>
           </a:p>
         </p:txBody>
       </p:sp>
@@ -4091,23 +4046,7 @@
                   <a:srgbClr val="660033"/>
                 </a:solidFill>
               </a:rPr>
-              <a:t>( </a:t>
-            </a:r>
-            <a:r>
-              <a:rPr lang="en-US" sz="4267" b="1" dirty="0">
-                <a:solidFill>
-                  <a:srgbClr val="660033"/>
-                </a:solidFill>
-              </a:rPr>
-              <a:t>2 </a:t>
-            </a:r>
-            <a:r>
-              <a:rPr lang="en-US" sz="4267" b="1" dirty="0">
-                <a:solidFill>
-                  <a:srgbClr val="660033"/>
-                </a:solidFill>
-              </a:rPr>
-              <a:t>)</a:t>
+              <a:t>( 2 / 4 )</a:t>
             </a:r>
             <a:endParaRPr lang="vi-VN" sz="4267" b="1" dirty="0">
               <a:solidFill>
@@ -4182,13 +4121,6 @@
               </a:rPr>
               <a:t>為你為你天家曾捨</a:t>
             </a:r>
-            <a:endParaRPr lang="zh-TW" altLang="en-US" sz="6400" b="1" dirty="0">
-              <a:solidFill>
-                <a:srgbClr val="660033"/>
-              </a:solidFill>
-              <a:latin typeface="微軟正黑體" pitchFamily="34" charset="-120"/>
-              <a:ea typeface="微軟正黑體" pitchFamily="34" charset="-120"/>
-            </a:endParaRPr>
           </a:p>
         </p:txBody>
       </p:sp>
@@ -4526,23 +4458,7 @@
                   <a:srgbClr val="660033"/>
                 </a:solidFill>
               </a:rPr>
-              <a:t>( </a:t>
-            </a:r>
-            <a:r>
-              <a:rPr lang="en-US" sz="4267" b="1" dirty="0">
-                <a:solidFill>
-                  <a:srgbClr val="660033"/>
-                </a:solidFill>
-              </a:rPr>
-              <a:t>2 </a:t>
-            </a:r>
-            <a:r>
-              <a:rPr lang="en-US" sz="4267" b="1" dirty="0">
-                <a:solidFill>
-                  <a:srgbClr val="660033"/>
-                </a:solidFill>
-              </a:rPr>
-              <a:t>)</a:t>
+              <a:t>( 2 / 4 )</a:t>
             </a:r>
             <a:endParaRPr lang="vi-VN" sz="4267" b="1" dirty="0">
               <a:solidFill>
@@ -4855,14 +4771,6 @@
               </a:rPr>
               <a:t>?</a:t>
             </a:r>
-            <a:endParaRPr lang="en-US" b="1" dirty="0">
-              <a:solidFill>
-                <a:srgbClr val="000066"/>
-              </a:solidFill>
-              <a:latin typeface="Calibri" panose="020F0502020204030204" pitchFamily="34" charset="0"/>
-              <a:ea typeface="微軟正黑體" pitchFamily="34" charset="-120"/>
-              <a:cs typeface="Calibri" panose="020F0502020204030204" pitchFamily="34" charset="0"/>
-            </a:endParaRPr>
           </a:p>
         </p:txBody>
       </p:sp>
@@ -4895,23 +4803,7 @@
                   <a:srgbClr val="660033"/>
                 </a:solidFill>
               </a:rPr>
-              <a:t>( </a:t>
-            </a:r>
-            <a:r>
-              <a:rPr lang="en-US" sz="4267" b="1" dirty="0">
-                <a:solidFill>
-                  <a:srgbClr val="660033"/>
-                </a:solidFill>
-              </a:rPr>
-              <a:t>2 </a:t>
-            </a:r>
-            <a:r>
-              <a:rPr lang="en-US" sz="4267" b="1" dirty="0">
-                <a:solidFill>
-                  <a:srgbClr val="660033"/>
-                </a:solidFill>
-              </a:rPr>
-              <a:t>)</a:t>
+              <a:t>( 2 / 4 )</a:t>
             </a:r>
             <a:endParaRPr lang="vi-VN" sz="4267" b="1" dirty="0">
               <a:solidFill>
@@ -4986,13 +4878,6 @@
               </a:rPr>
               <a:t>我曾大受苦難  非人口舌能說</a:t>
             </a:r>
-            <a:endParaRPr lang="zh-TW" altLang="en-US" sz="6400" b="1" dirty="0">
-              <a:solidFill>
-                <a:srgbClr val="660033"/>
-              </a:solidFill>
-              <a:latin typeface="微軟正黑體" pitchFamily="34" charset="-120"/>
-              <a:ea typeface="微軟正黑體" pitchFamily="34" charset="-120"/>
-            </a:endParaRPr>
           </a:p>
         </p:txBody>
       </p:sp>
@@ -5385,23 +5270,7 @@
                   <a:srgbClr val="660033"/>
                 </a:solidFill>
               </a:rPr>
-              <a:t>( </a:t>
-            </a:r>
-            <a:r>
-              <a:rPr lang="en-US" sz="4267" b="1" dirty="0">
-                <a:solidFill>
-                  <a:srgbClr val="660033"/>
-                </a:solidFill>
-              </a:rPr>
-              <a:t>3 </a:t>
-            </a:r>
-            <a:r>
-              <a:rPr lang="en-US" sz="4267" b="1" dirty="0">
-                <a:solidFill>
-                  <a:srgbClr val="660033"/>
-                </a:solidFill>
-              </a:rPr>
-              <a:t>)</a:t>
+              <a:t>( 3 / 4 )</a:t>
             </a:r>
             <a:endParaRPr lang="vi-VN" sz="4267" b="1" dirty="0">
               <a:solidFill>
@@ -5929,23 +5798,7 @@
                   <a:srgbClr val="660033"/>
                 </a:solidFill>
               </a:rPr>
-              <a:t>( </a:t>
-            </a:r>
-            <a:r>
-              <a:rPr lang="en-US" sz="4267" b="1" dirty="0">
-                <a:solidFill>
-                  <a:srgbClr val="660033"/>
-                </a:solidFill>
-              </a:rPr>
-              <a:t>3 </a:t>
-            </a:r>
-            <a:r>
-              <a:rPr lang="en-US" sz="4267" b="1" dirty="0">
-                <a:solidFill>
-                  <a:srgbClr val="660033"/>
-                </a:solidFill>
-              </a:rPr>
-              <a:t>)</a:t>
+              <a:t>( 3 / 4 )</a:t>
             </a:r>
             <a:endParaRPr lang="vi-VN" sz="4267" b="1" dirty="0">
               <a:solidFill>
@@ -6020,13 +5873,6 @@
               </a:rPr>
               <a:t>為你為你我身曾捨</a:t>
             </a:r>
-            <a:endParaRPr lang="zh-TW" altLang="en-US" sz="6400" b="1" dirty="0">
-              <a:solidFill>
-                <a:srgbClr val="660033"/>
-              </a:solidFill>
-              <a:latin typeface="微軟正黑體" pitchFamily="34" charset="-120"/>
-              <a:ea typeface="微軟正黑體" pitchFamily="34" charset="-120"/>
-            </a:endParaRPr>
           </a:p>
         </p:txBody>
       </p:sp>
@@ -6364,23 +6210,7 @@
                   <a:srgbClr val="660033"/>
                 </a:solidFill>
               </a:rPr>
-              <a:t>( </a:t>
-            </a:r>
-            <a:r>
-              <a:rPr lang="en-US" sz="4267" b="1" dirty="0">
-                <a:solidFill>
-                  <a:srgbClr val="660033"/>
-                </a:solidFill>
-              </a:rPr>
-              <a:t>3 </a:t>
-            </a:r>
-            <a:r>
-              <a:rPr lang="en-US" sz="4267" b="1" dirty="0">
-                <a:solidFill>
-                  <a:srgbClr val="660033"/>
-                </a:solidFill>
-              </a:rPr>
-              <a:t>)</a:t>
+              <a:t>( 3 / 4 )</a:t>
             </a:r>
             <a:endParaRPr lang="vi-VN" sz="4267" b="1" dirty="0">
               <a:solidFill>
@@ -6693,14 +6523,6 @@
               </a:rPr>
               <a:t>?</a:t>
             </a:r>
-            <a:endParaRPr lang="en-US" b="1" dirty="0">
-              <a:solidFill>
-                <a:srgbClr val="000066"/>
-              </a:solidFill>
-              <a:latin typeface="Calibri" panose="020F0502020204030204" pitchFamily="34" charset="0"/>
-              <a:ea typeface="微軟正黑體" pitchFamily="34" charset="-120"/>
-              <a:cs typeface="Calibri" panose="020F0502020204030204" pitchFamily="34" charset="0"/>
-            </a:endParaRPr>
           </a:p>
         </p:txBody>
       </p:sp>
@@ -6733,23 +6555,7 @@
                   <a:srgbClr val="660033"/>
                 </a:solidFill>
               </a:rPr>
-              <a:t>( </a:t>
-            </a:r>
-            <a:r>
-              <a:rPr lang="en-US" sz="4267" b="1" dirty="0">
-                <a:solidFill>
-                  <a:srgbClr val="660033"/>
-                </a:solidFill>
-              </a:rPr>
-              <a:t>3 </a:t>
-            </a:r>
-            <a:r>
-              <a:rPr lang="en-US" sz="4267" b="1" dirty="0">
-                <a:solidFill>
-                  <a:srgbClr val="660033"/>
-                </a:solidFill>
-              </a:rPr>
-              <a:t>)</a:t>
+              <a:t>( 3 / 4 )</a:t>
             </a:r>
             <a:endParaRPr lang="vi-VN" sz="4267" b="1" dirty="0">
               <a:solidFill>
@@ -6822,15 +6628,8 @@
                 <a:latin typeface="微軟正黑體" pitchFamily="34" charset="-120"/>
                 <a:ea typeface="微軟正黑體" pitchFamily="34" charset="-120"/>
               </a:rPr>
-              <a:t>為你為你我身曾捨</a:t>
-            </a:r>
-            <a:endParaRPr lang="zh-TW" altLang="en-US" sz="6400" b="1" dirty="0">
-              <a:solidFill>
-                <a:srgbClr val="660033"/>
-              </a:solidFill>
-              <a:latin typeface="微軟正黑體" pitchFamily="34" charset="-120"/>
-              <a:ea typeface="微軟正黑體" pitchFamily="34" charset="-120"/>
-            </a:endParaRPr>
+              <a:t>為你  為你我身曾捨</a:t>
+            </a:r>
           </a:p>
         </p:txBody>
       </p:sp>
@@ -7168,23 +6967,7 @@
                   <a:srgbClr val="660033"/>
                 </a:solidFill>
               </a:rPr>
-              <a:t>( </a:t>
-            </a:r>
-            <a:r>
-              <a:rPr lang="en-US" sz="4267" b="1" dirty="0">
-                <a:solidFill>
-                  <a:srgbClr val="660033"/>
-                </a:solidFill>
-              </a:rPr>
-              <a:t>3 </a:t>
-            </a:r>
-            <a:r>
-              <a:rPr lang="en-US" sz="4267" b="1" dirty="0">
-                <a:solidFill>
-                  <a:srgbClr val="660033"/>
-                </a:solidFill>
-              </a:rPr>
-              <a:t>)</a:t>
+              <a:t>( 3 / 4 )</a:t>
             </a:r>
             <a:endParaRPr lang="vi-VN" sz="4267" b="1" dirty="0">
               <a:solidFill>
@@ -7497,14 +7280,6 @@
               </a:rPr>
               <a:t>?</a:t>
             </a:r>
-            <a:endParaRPr lang="en-US" b="1" dirty="0">
-              <a:solidFill>
-                <a:srgbClr val="000066"/>
-              </a:solidFill>
-              <a:latin typeface="Calibri" panose="020F0502020204030204" pitchFamily="34" charset="0"/>
-              <a:ea typeface="微軟正黑體" pitchFamily="34" charset="-120"/>
-              <a:cs typeface="Calibri" panose="020F0502020204030204" pitchFamily="34" charset="0"/>
-            </a:endParaRPr>
           </a:p>
         </p:txBody>
       </p:sp>
@@ -7537,23 +7312,7 @@
                   <a:srgbClr val="660033"/>
                 </a:solidFill>
               </a:rPr>
-              <a:t>( </a:t>
-            </a:r>
-            <a:r>
-              <a:rPr lang="en-US" sz="4267" b="1" dirty="0">
-                <a:solidFill>
-                  <a:srgbClr val="660033"/>
-                </a:solidFill>
-              </a:rPr>
-              <a:t>3 </a:t>
-            </a:r>
-            <a:r>
-              <a:rPr lang="en-US" sz="4267" b="1" dirty="0">
-                <a:solidFill>
-                  <a:srgbClr val="660033"/>
-                </a:solidFill>
-              </a:rPr>
-              <a:t>)</a:t>
+              <a:t>( 3 / 4 )</a:t>
             </a:r>
             <a:endParaRPr lang="vi-VN" sz="4267" b="1" dirty="0">
               <a:solidFill>
@@ -7648,13 +7407,6 @@
               </a:rPr>
               <a:t>我血為你流出</a:t>
             </a:r>
-            <a:endParaRPr lang="zh-TW" altLang="en-US" sz="6400" b="1" dirty="0">
-              <a:solidFill>
-                <a:srgbClr val="660033"/>
-              </a:solidFill>
-              <a:latin typeface="微軟正黑體" pitchFamily="34" charset="-120"/>
-              <a:ea typeface="微軟正黑體" pitchFamily="34" charset="-120"/>
-            </a:endParaRPr>
           </a:p>
         </p:txBody>
       </p:sp>
@@ -8058,7 +7810,7 @@
                   <a:srgbClr val="660033"/>
                 </a:solidFill>
               </a:rPr>
-              <a:t>( 1 )</a:t>
+              <a:t>( 1 / 4 )</a:t>
             </a:r>
             <a:endParaRPr lang="vi-VN" sz="4267" b="1" dirty="0">
               <a:solidFill>
@@ -8597,23 +8349,7 @@
                   <a:srgbClr val="660033"/>
                 </a:solidFill>
               </a:rPr>
-              <a:t>( </a:t>
-            </a:r>
-            <a:r>
-              <a:rPr lang="en-US" sz="4267" b="1" dirty="0">
-                <a:solidFill>
-                  <a:srgbClr val="660033"/>
-                </a:solidFill>
-              </a:rPr>
-              <a:t>4 </a:t>
-            </a:r>
-            <a:r>
-              <a:rPr lang="en-US" sz="4267" b="1" dirty="0">
-                <a:solidFill>
-                  <a:srgbClr val="660033"/>
-                </a:solidFill>
-              </a:rPr>
-              <a:t>)</a:t>
+              <a:t>( 4 / 4 )</a:t>
             </a:r>
             <a:endParaRPr lang="vi-VN" sz="4267" b="1" dirty="0">
               <a:solidFill>
@@ -8688,13 +8424,6 @@
               </a:rPr>
               <a:t>此恩充滿你身  即我寬容仁愛</a:t>
             </a:r>
-            <a:endParaRPr lang="zh-TW" altLang="en-US" sz="6400" b="1" dirty="0">
-              <a:solidFill>
-                <a:srgbClr val="660033"/>
-              </a:solidFill>
-              <a:latin typeface="微軟正黑體" pitchFamily="34" charset="-120"/>
-              <a:ea typeface="微軟正黑體" pitchFamily="34" charset="-120"/>
-            </a:endParaRPr>
           </a:p>
         </p:txBody>
       </p:sp>
@@ -9109,23 +8838,7 @@
                   <a:srgbClr val="660033"/>
                 </a:solidFill>
               </a:rPr>
-              <a:t>( </a:t>
-            </a:r>
-            <a:r>
-              <a:rPr lang="en-US" sz="4267" b="1" dirty="0">
-                <a:solidFill>
-                  <a:srgbClr val="660033"/>
-                </a:solidFill>
-              </a:rPr>
-              <a:t>4 </a:t>
-            </a:r>
-            <a:r>
-              <a:rPr lang="en-US" sz="4267" b="1" dirty="0">
-                <a:solidFill>
-                  <a:srgbClr val="660033"/>
-                </a:solidFill>
-              </a:rPr>
-              <a:t>)</a:t>
+              <a:t>( 4 / 4 )</a:t>
             </a:r>
             <a:endParaRPr lang="vi-VN" sz="4267" b="1" dirty="0">
               <a:solidFill>
@@ -9198,15 +8911,8 @@
                 <a:latin typeface="微軟正黑體" pitchFamily="34" charset="-120"/>
                 <a:ea typeface="微軟正黑體" pitchFamily="34" charset="-120"/>
               </a:rPr>
-              <a:t>向你向你大恩曾施</a:t>
-            </a:r>
-            <a:endParaRPr lang="zh-TW" altLang="en-US" sz="6400" b="1" dirty="0">
-              <a:solidFill>
-                <a:srgbClr val="660033"/>
-              </a:solidFill>
-              <a:latin typeface="微軟正黑體" pitchFamily="34" charset="-120"/>
-              <a:ea typeface="微軟正黑體" pitchFamily="34" charset="-120"/>
-            </a:endParaRPr>
+              <a:t>向你  向你大恩曾施</a:t>
+            </a:r>
           </a:p>
         </p:txBody>
       </p:sp>
@@ -9566,23 +9272,7 @@
                   <a:srgbClr val="660033"/>
                 </a:solidFill>
               </a:rPr>
-              <a:t>( </a:t>
-            </a:r>
-            <a:r>
-              <a:rPr lang="en-US" sz="4267" b="1" dirty="0">
-                <a:solidFill>
-                  <a:srgbClr val="660033"/>
-                </a:solidFill>
-              </a:rPr>
-              <a:t>4 </a:t>
-            </a:r>
-            <a:r>
-              <a:rPr lang="en-US" sz="4267" b="1" dirty="0">
-                <a:solidFill>
-                  <a:srgbClr val="660033"/>
-                </a:solidFill>
-              </a:rPr>
-              <a:t>)</a:t>
+              <a:t>( 4 / 4 )</a:t>
             </a:r>
             <a:endParaRPr lang="vi-VN" sz="4267" b="1" dirty="0">
               <a:solidFill>
@@ -9895,14 +9585,6 @@
               </a:rPr>
               <a:t>?</a:t>
             </a:r>
-            <a:endParaRPr lang="en-US" b="1" dirty="0">
-              <a:solidFill>
-                <a:srgbClr val="000066"/>
-              </a:solidFill>
-              <a:latin typeface="Calibri" panose="020F0502020204030204" pitchFamily="34" charset="0"/>
-              <a:ea typeface="微軟正黑體" pitchFamily="34" charset="-120"/>
-              <a:cs typeface="Calibri" panose="020F0502020204030204" pitchFamily="34" charset="0"/>
-            </a:endParaRPr>
           </a:p>
         </p:txBody>
       </p:sp>
@@ -9935,23 +9617,7 @@
                   <a:srgbClr val="660033"/>
                 </a:solidFill>
               </a:rPr>
-              <a:t>( </a:t>
-            </a:r>
-            <a:r>
-              <a:rPr lang="en-US" sz="4267" b="1" dirty="0">
-                <a:solidFill>
-                  <a:srgbClr val="660033"/>
-                </a:solidFill>
-              </a:rPr>
-              <a:t>4 </a:t>
-            </a:r>
-            <a:r>
-              <a:rPr lang="en-US" sz="4267" b="1" dirty="0">
-                <a:solidFill>
-                  <a:srgbClr val="660033"/>
-                </a:solidFill>
-              </a:rPr>
-              <a:t>)</a:t>
+              <a:t>( 4 / 4 )</a:t>
             </a:r>
             <a:endParaRPr lang="vi-VN" sz="4267" b="1" dirty="0">
               <a:solidFill>
@@ -10024,15 +9690,8 @@
                 <a:latin typeface="微軟正黑體" pitchFamily="34" charset="-120"/>
                 <a:ea typeface="微軟正黑體" pitchFamily="34" charset="-120"/>
               </a:rPr>
-              <a:t>向你向你大恩曾施</a:t>
-            </a:r>
-            <a:endParaRPr lang="zh-TW" altLang="en-US" sz="6400" b="1" dirty="0">
-              <a:solidFill>
-                <a:srgbClr val="660033"/>
-              </a:solidFill>
-              <a:latin typeface="微軟正黑體" pitchFamily="34" charset="-120"/>
-              <a:ea typeface="微軟正黑體" pitchFamily="34" charset="-120"/>
-            </a:endParaRPr>
+              <a:t>向你  向你大恩曾施</a:t>
+            </a:r>
           </a:p>
         </p:txBody>
       </p:sp>
@@ -10392,23 +10051,7 @@
                   <a:srgbClr val="660033"/>
                 </a:solidFill>
               </a:rPr>
-              <a:t>( </a:t>
-            </a:r>
-            <a:r>
-              <a:rPr lang="en-US" sz="4267" b="1" dirty="0">
-                <a:solidFill>
-                  <a:srgbClr val="660033"/>
-                </a:solidFill>
-              </a:rPr>
-              <a:t>4 </a:t>
-            </a:r>
-            <a:r>
-              <a:rPr lang="en-US" sz="4267" b="1" dirty="0">
-                <a:solidFill>
-                  <a:srgbClr val="660033"/>
-                </a:solidFill>
-              </a:rPr>
-              <a:t>)</a:t>
+              <a:t>( 4 / 4 )</a:t>
             </a:r>
             <a:endParaRPr lang="vi-VN" sz="4267" b="1" dirty="0">
               <a:solidFill>
@@ -10721,14 +10364,6 @@
               </a:rPr>
               <a:t>?</a:t>
             </a:r>
-            <a:endParaRPr lang="en-US" b="1" dirty="0">
-              <a:solidFill>
-                <a:srgbClr val="000066"/>
-              </a:solidFill>
-              <a:latin typeface="Calibri" panose="020F0502020204030204" pitchFamily="34" charset="0"/>
-              <a:ea typeface="微軟正黑體" pitchFamily="34" charset="-120"/>
-              <a:cs typeface="Calibri" panose="020F0502020204030204" pitchFamily="34" charset="0"/>
-            </a:endParaRPr>
           </a:p>
         </p:txBody>
       </p:sp>
@@ -10761,23 +10396,7 @@
                   <a:srgbClr val="660033"/>
                 </a:solidFill>
               </a:rPr>
-              <a:t>( </a:t>
-            </a:r>
-            <a:r>
-              <a:rPr lang="en-US" sz="4267" b="1" dirty="0">
-                <a:solidFill>
-                  <a:srgbClr val="660033"/>
-                </a:solidFill>
-              </a:rPr>
-              <a:t>4 </a:t>
-            </a:r>
-            <a:r>
-              <a:rPr lang="en-US" sz="4267" b="1" dirty="0">
-                <a:solidFill>
-                  <a:srgbClr val="660033"/>
-                </a:solidFill>
-              </a:rPr>
-              <a:t>)</a:t>
+              <a:t>( 4 / 4 )</a:t>
             </a:r>
             <a:endParaRPr lang="vi-VN" sz="4267" b="1" dirty="0">
               <a:solidFill>
@@ -10852,13 +10471,6 @@
               </a:rPr>
               <a:t>救你從死復起  使你多罪得贖</a:t>
             </a:r>
-            <a:endParaRPr lang="zh-TW" altLang="en-US" sz="6400" b="1" dirty="0">
-              <a:solidFill>
-                <a:srgbClr val="660033"/>
-              </a:solidFill>
-              <a:latin typeface="微軟正黑體" pitchFamily="34" charset="-120"/>
-              <a:ea typeface="微軟正黑體" pitchFamily="34" charset="-120"/>
-            </a:endParaRPr>
           </a:p>
         </p:txBody>
       </p:sp>
@@ -11244,14 +10856,6 @@
               </a:rPr>
               <a:t>  </a:t>
             </a:r>
-            <a:endParaRPr lang="en-US" b="1" dirty="0">
-              <a:solidFill>
-                <a:srgbClr val="000066"/>
-              </a:solidFill>
-              <a:latin typeface="Calibri" panose="020F0502020204030204" pitchFamily="34" charset="0"/>
-              <a:ea typeface="微軟正黑體" pitchFamily="34" charset="-120"/>
-              <a:cs typeface="Calibri" panose="020F0502020204030204" pitchFamily="34" charset="0"/>
-            </a:endParaRPr>
           </a:p>
         </p:txBody>
       </p:sp>
@@ -11284,7 +10888,7 @@
                   <a:srgbClr val="660033"/>
                 </a:solidFill>
               </a:rPr>
-              <a:t>( 1 )</a:t>
+              <a:t>( 1 / 4 )</a:t>
             </a:r>
             <a:endParaRPr lang="vi-VN" sz="4267" b="1" dirty="0">
               <a:solidFill>
@@ -11359,13 +10963,6 @@
               </a:rPr>
               <a:t>為你為你我命曾捨</a:t>
             </a:r>
-            <a:endParaRPr lang="zh-TW" altLang="en-US" sz="6400" b="1" dirty="0">
-              <a:solidFill>
-                <a:srgbClr val="660033"/>
-              </a:solidFill>
-              <a:latin typeface="微軟正黑體" pitchFamily="34" charset="-120"/>
-              <a:ea typeface="微軟正黑體" pitchFamily="34" charset="-120"/>
-            </a:endParaRPr>
           </a:p>
         </p:txBody>
       </p:sp>
@@ -11703,7 +11300,7 @@
                   <a:srgbClr val="660033"/>
                 </a:solidFill>
               </a:rPr>
-              <a:t>( 1 )</a:t>
+              <a:t>( 1 / 4 )</a:t>
             </a:r>
             <a:endParaRPr lang="vi-VN" sz="4267" b="1" dirty="0">
               <a:solidFill>
@@ -12016,14 +11613,6 @@
               </a:rPr>
               <a:t>?</a:t>
             </a:r>
-            <a:endParaRPr lang="en-US" b="1" dirty="0">
-              <a:solidFill>
-                <a:srgbClr val="000066"/>
-              </a:solidFill>
-              <a:latin typeface="Calibri" panose="020F0502020204030204" pitchFamily="34" charset="0"/>
-              <a:ea typeface="微軟正黑體" pitchFamily="34" charset="-120"/>
-              <a:cs typeface="Calibri" panose="020F0502020204030204" pitchFamily="34" charset="0"/>
-            </a:endParaRPr>
           </a:p>
         </p:txBody>
       </p:sp>
@@ -12056,7 +11645,7 @@
                   <a:srgbClr val="660033"/>
                 </a:solidFill>
               </a:rPr>
-              <a:t>( 1 )</a:t>
+              <a:t>( 1 / 4 )</a:t>
             </a:r>
             <a:endParaRPr lang="vi-VN" sz="4267" b="1" dirty="0">
               <a:solidFill>
@@ -12129,15 +11718,8 @@
                 <a:latin typeface="微軟正黑體" pitchFamily="34" charset="-120"/>
                 <a:ea typeface="微軟正黑體" pitchFamily="34" charset="-120"/>
               </a:rPr>
-              <a:t>為你為你我命曾捨</a:t>
-            </a:r>
-            <a:endParaRPr lang="zh-TW" altLang="en-US" sz="6400" b="1" dirty="0">
-              <a:solidFill>
-                <a:srgbClr val="660033"/>
-              </a:solidFill>
-              <a:latin typeface="微軟正黑體" pitchFamily="34" charset="-120"/>
-              <a:ea typeface="微軟正黑體" pitchFamily="34" charset="-120"/>
-            </a:endParaRPr>
+              <a:t>為你  為你我命曾捨</a:t>
+            </a:r>
           </a:p>
         </p:txBody>
       </p:sp>
@@ -12475,7 +12057,7 @@
                   <a:srgbClr val="660033"/>
                 </a:solidFill>
               </a:rPr>
-              <a:t>( 1 )</a:t>
+              <a:t>( 1 / 4 )</a:t>
             </a:r>
             <a:endParaRPr lang="vi-VN" sz="4267" b="1" dirty="0">
               <a:solidFill>
@@ -12788,14 +12370,6 @@
               </a:rPr>
               <a:t>?</a:t>
             </a:r>
-            <a:endParaRPr lang="en-US" b="1" dirty="0">
-              <a:solidFill>
-                <a:srgbClr val="000066"/>
-              </a:solidFill>
-              <a:latin typeface="Calibri" panose="020F0502020204030204" pitchFamily="34" charset="0"/>
-              <a:ea typeface="微軟正黑體" pitchFamily="34" charset="-120"/>
-              <a:cs typeface="Calibri" panose="020F0502020204030204" pitchFamily="34" charset="0"/>
-            </a:endParaRPr>
           </a:p>
         </p:txBody>
       </p:sp>
@@ -12828,7 +12402,7 @@
                   <a:srgbClr val="660033"/>
                 </a:solidFill>
               </a:rPr>
-              <a:t>( 1 )</a:t>
+              <a:t>( 1 / 4 )</a:t>
             </a:r>
             <a:endParaRPr lang="vi-VN" sz="4267" b="1" dirty="0">
               <a:solidFill>
@@ -12903,13 +12477,6 @@
               </a:rPr>
               <a:t>我曾離父家庭  並我榮光寶座</a:t>
             </a:r>
-            <a:endParaRPr lang="zh-TW" altLang="en-US" sz="6400" b="1" dirty="0">
-              <a:solidFill>
-                <a:srgbClr val="660033"/>
-              </a:solidFill>
-              <a:latin typeface="微軟正黑體" pitchFamily="34" charset="-120"/>
-              <a:ea typeface="微軟正黑體" pitchFamily="34" charset="-120"/>
-            </a:endParaRPr>
           </a:p>
         </p:txBody>
       </p:sp>
@@ -13280,23 +12847,7 @@
                   <a:srgbClr val="660033"/>
                 </a:solidFill>
               </a:rPr>
-              <a:t>( </a:t>
-            </a:r>
-            <a:r>
-              <a:rPr lang="en-US" sz="4267" b="1" dirty="0">
-                <a:solidFill>
-                  <a:srgbClr val="660033"/>
-                </a:solidFill>
-              </a:rPr>
-              <a:t>2 </a:t>
-            </a:r>
-            <a:r>
-              <a:rPr lang="en-US" sz="4267" b="1" dirty="0">
-                <a:solidFill>
-                  <a:srgbClr val="660033"/>
-                </a:solidFill>
-              </a:rPr>
-              <a:t>)</a:t>
+              <a:t>( 2 / 4 )</a:t>
             </a:r>
             <a:endParaRPr lang="vi-VN" sz="4267" b="1" dirty="0">
               <a:solidFill>
@@ -13371,13 +12922,6 @@
               </a:rPr>
               <a:t>淒涼悲哀獨行  在此暗世經過</a:t>
             </a:r>
-            <a:endParaRPr lang="zh-TW" altLang="en-US" sz="6400" b="1" dirty="0">
-              <a:solidFill>
-                <a:srgbClr val="660033"/>
-              </a:solidFill>
-              <a:latin typeface="微軟正黑體" pitchFamily="34" charset="-120"/>
-              <a:ea typeface="微軟正黑體" pitchFamily="34" charset="-120"/>
-            </a:endParaRPr>
           </a:p>
         </p:txBody>
       </p:sp>
@@ -13814,23 +13358,7 @@
                   <a:srgbClr val="660033"/>
                 </a:solidFill>
               </a:rPr>
-              <a:t>( </a:t>
-            </a:r>
-            <a:r>
-              <a:rPr lang="en-US" sz="4267" b="1" dirty="0">
-                <a:solidFill>
-                  <a:srgbClr val="660033"/>
-                </a:solidFill>
-              </a:rPr>
-              <a:t>2 </a:t>
-            </a:r>
-            <a:r>
-              <a:rPr lang="en-US" sz="4267" b="1" dirty="0">
-                <a:solidFill>
-                  <a:srgbClr val="660033"/>
-                </a:solidFill>
-              </a:rPr>
-              <a:t>)</a:t>
+              <a:t>( 2 / 4 )</a:t>
             </a:r>
             <a:endParaRPr lang="vi-VN" sz="4267" b="1" dirty="0">
               <a:solidFill>
